--- a/public/fun/pack/pptx/birthdaypro/돌잔치프리미엄_46_성장기록중심_로즈쿼츠.pptx
+++ b/public/fun/pack/pptx/birthdaypro/돌잔치프리미엄_46_성장기록중심_로즈쿼츠.pptx
@@ -112,12 +112,12 @@
   <p:extLst>
     <p:ext uri="{521415D9-36F7-43E2-AB2F-B90AF26B5E84}">
       <p14:sectionLst xmlns:p14="http://schemas.microsoft.com/office/powerpoint/2010/main">
-        <p14:section name="시작" id="{59D285A0-BCF7-4E2D-AF62-C4AE206F22C5}">
+        <p14:section name="시작" id="{BECB2E7F-ABF8-43C9-B361-E0970BF17F7F}">
           <p14:sldIdLst>
             <p14:sldId id="256"/>
           </p14:sldIdLst>
         </p14:section>
-        <p14:section name="본문" id="{84745ADF-635F-449E-86EA-F9555008E7F8}">
+        <p14:section name="본문" id="{ED51F85A-7415-4535-8104-553335B7FB78}">
           <p14:sldIdLst>
             <p14:sldId id="257"/>
             <p14:sldId id="258"/>
@@ -125,7 +125,7 @@
             <p14:sldId id="260"/>
           </p14:sldIdLst>
         </p14:section>
-        <p14:section name="마무리" id="{FDC18B9C-DB97-4744-9BD6-FC3C146F2AD1}">
+        <p14:section name="마무리" id="{29AFC424-3CE6-48D6-93FA-C4A0DF77D24C}">
           <p14:sldIdLst>
             <p14:sldId id="261"/>
           </p14:sldIdLst>
@@ -1629,7 +1629,7 @@
             </a:lvl1pPr>
           </a:lstStyle>
           <a:p>
-            <a:fld id="{D89CF49B-2ACD-4B94-A612-E86E94AEA7A6}" type="slidenum">
+            <a:fld id="{43D1BBF5-33EF-4B30-8356-8AE2D456F91B}" type="slidenum">
               <a:rPr lang="en-US"/>
               <a:t>‹#›</a:t>
             </a:fld>
@@ -2308,7 +2308,7 @@
             </a:lvl1pPr>
           </a:lstStyle>
           <a:p>
-            <a:fld id="{0CA18894-697D-4BAF-9E62-AD14DCE43517}" type="slidenum">
+            <a:fld id="{20B41508-A63A-4B72-8CF2-E06B325EFFCF}" type="slidenum">
               <a:rPr lang="en-US"/>
               <a:t>‹#›</a:t>
             </a:fld>
@@ -2986,7 +2986,7 @@
             </a:lvl1pPr>
           </a:lstStyle>
           <a:p>
-            <a:fld id="{C463E12F-BE5F-46C7-B996-CEE56E88089B}" type="slidenum">
+            <a:fld id="{F8F3C6C5-AE0A-4996-A1D6-8B4E597CBE24}" type="slidenum">
               <a:rPr lang="en-US"/>
               <a:t>‹#›</a:t>
             </a:fld>
@@ -3827,7 +3827,7 @@
           <a:p>
             <a:r>
               <a:rPr lang="ko-KR"/>
-              <a:t>열두 달, 잘 자라 주었습니다</a:t>
+              <a:t>그동안 잘 자라 주었습니다</a:t>
             </a:r>
           </a:p>
         </p:txBody>
@@ -3849,7 +3849,7 @@
           <a:p>
             <a:r>
               <a:rPr lang="ko-KR"/>
-              <a:t>아기 이름 · 0000. 00. 00</a:t>
+              <a:t>아기 이름 · 날짜 입력</a:t>
             </a:r>
           </a:p>
           <a:p>
@@ -4010,7 +4010,7 @@
           <a:bodyPr/>
           <a:lstStyle/>
           <a:p>
-            <a:fld id="{C2A48D52-2509-4DF4-99C4-1AA7095E5C3A}" type="slidenum">
+            <a:fld id="{7AC02703-DD1E-46AE-8727-AFCD81CD9A1D}" type="slidenum">
               <a:rPr lang="en-US"/>
               <a:t>‹#›</a:t>
             </a:fld>
@@ -4610,7 +4610,7 @@
           <a:bodyPr/>
           <a:lstStyle/>
           <a:p>
-            <a:fld id="{698515DE-812A-45ED-A168-D45325F0DC39}" type="slidenum">
+            <a:fld id="{6A75A579-7D74-4EDC-A905-43047960A457}" type="slidenum">
               <a:rPr lang="en-US"/>
               <a:t>‹#›</a:t>
             </a:fld>
@@ -5630,7 +5630,7 @@
           <a:bodyPr/>
           <a:lstStyle/>
           <a:p>
-            <a:fld id="{E67C1139-7795-454D-BE87-86E3C35882D9}" type="slidenum">
+            <a:fld id="{6AD4B90C-A06E-4EB7-8419-CBC31B2BB373}" type="slidenum">
               <a:rPr lang="en-US"/>
               <a:t>‹#›</a:t>
             </a:fld>
@@ -6305,7 +6305,7 @@
           <a:bodyPr/>
           <a:lstStyle/>
           <a:p>
-            <a:fld id="{B8420892-DD47-49FD-9BDC-4F85315BE746}" type="slidenum">
+            <a:fld id="{17110159-5FFA-498F-9FDF-92C5CBCC712A}" type="slidenum">
               <a:rPr lang="en-US"/>
               <a:t>‹#›</a:t>
             </a:fld>
